--- a/slides/diffusion_models4.pptx
+++ b/slides/diffusion_models4.pptx
@@ -282,7 +282,7 @@
           <a:p>
             <a:fld id="{D80B7ED7-426B-449D-9ABA-D90F5EFE8362}" type="datetimeFigureOut">
               <a:rPr lang="da-DK" smtClean="0"/>
-              <a:t>19.02.2026</a:t>
+              <a:t>23-02-2026</a:t>
             </a:fld>
             <a:endParaRPr lang="da-DK"/>
           </a:p>
@@ -480,7 +480,7 @@
           <a:p>
             <a:fld id="{D80B7ED7-426B-449D-9ABA-D90F5EFE8362}" type="datetimeFigureOut">
               <a:rPr lang="da-DK" smtClean="0"/>
-              <a:t>19.02.2026</a:t>
+              <a:t>23-02-2026</a:t>
             </a:fld>
             <a:endParaRPr lang="da-DK"/>
           </a:p>
@@ -688,7 +688,7 @@
           <a:p>
             <a:fld id="{D80B7ED7-426B-449D-9ABA-D90F5EFE8362}" type="datetimeFigureOut">
               <a:rPr lang="da-DK" smtClean="0"/>
-              <a:t>19.02.2026</a:t>
+              <a:t>23-02-2026</a:t>
             </a:fld>
             <a:endParaRPr lang="da-DK"/>
           </a:p>
@@ -886,7 +886,7 @@
           <a:p>
             <a:fld id="{D80B7ED7-426B-449D-9ABA-D90F5EFE8362}" type="datetimeFigureOut">
               <a:rPr lang="da-DK" smtClean="0"/>
-              <a:t>19.02.2026</a:t>
+              <a:t>23-02-2026</a:t>
             </a:fld>
             <a:endParaRPr lang="da-DK"/>
           </a:p>
@@ -1161,7 +1161,7 @@
           <a:p>
             <a:fld id="{D80B7ED7-426B-449D-9ABA-D90F5EFE8362}" type="datetimeFigureOut">
               <a:rPr lang="da-DK" smtClean="0"/>
-              <a:t>19.02.2026</a:t>
+              <a:t>23-02-2026</a:t>
             </a:fld>
             <a:endParaRPr lang="da-DK"/>
           </a:p>
@@ -1426,7 +1426,7 @@
           <a:p>
             <a:fld id="{D80B7ED7-426B-449D-9ABA-D90F5EFE8362}" type="datetimeFigureOut">
               <a:rPr lang="da-DK" smtClean="0"/>
-              <a:t>19.02.2026</a:t>
+              <a:t>23-02-2026</a:t>
             </a:fld>
             <a:endParaRPr lang="da-DK"/>
           </a:p>
@@ -1838,7 +1838,7 @@
           <a:p>
             <a:fld id="{D80B7ED7-426B-449D-9ABA-D90F5EFE8362}" type="datetimeFigureOut">
               <a:rPr lang="da-DK" smtClean="0"/>
-              <a:t>19.02.2026</a:t>
+              <a:t>23-02-2026</a:t>
             </a:fld>
             <a:endParaRPr lang="da-DK"/>
           </a:p>
@@ -1979,7 +1979,7 @@
           <a:p>
             <a:fld id="{D80B7ED7-426B-449D-9ABA-D90F5EFE8362}" type="datetimeFigureOut">
               <a:rPr lang="da-DK" smtClean="0"/>
-              <a:t>19.02.2026</a:t>
+              <a:t>23-02-2026</a:t>
             </a:fld>
             <a:endParaRPr lang="da-DK"/>
           </a:p>
@@ -2092,7 +2092,7 @@
           <a:p>
             <a:fld id="{D80B7ED7-426B-449D-9ABA-D90F5EFE8362}" type="datetimeFigureOut">
               <a:rPr lang="da-DK" smtClean="0"/>
-              <a:t>19.02.2026</a:t>
+              <a:t>23-02-2026</a:t>
             </a:fld>
             <a:endParaRPr lang="da-DK"/>
           </a:p>
@@ -2403,7 +2403,7 @@
           <a:p>
             <a:fld id="{D80B7ED7-426B-449D-9ABA-D90F5EFE8362}" type="datetimeFigureOut">
               <a:rPr lang="da-DK" smtClean="0"/>
-              <a:t>19.02.2026</a:t>
+              <a:t>23-02-2026</a:t>
             </a:fld>
             <a:endParaRPr lang="da-DK"/>
           </a:p>
@@ -2691,7 +2691,7 @@
           <a:p>
             <a:fld id="{D80B7ED7-426B-449D-9ABA-D90F5EFE8362}" type="datetimeFigureOut">
               <a:rPr lang="da-DK" smtClean="0"/>
-              <a:t>19.02.2026</a:t>
+              <a:t>23-02-2026</a:t>
             </a:fld>
             <a:endParaRPr lang="da-DK"/>
           </a:p>
@@ -2932,7 +2932,7 @@
           <a:p>
             <a:fld id="{D80B7ED7-426B-449D-9ABA-D90F5EFE8362}" type="datetimeFigureOut">
               <a:rPr lang="da-DK" smtClean="0"/>
-              <a:t>19.02.2026</a:t>
+              <a:t>23-02-2026</a:t>
             </a:fld>
             <a:endParaRPr lang="da-DK"/>
           </a:p>
@@ -10248,13 +10248,14 @@
           </p:cNvPr>
           <p:cNvCxnSpPr>
             <a:cxnSpLocks/>
+            <a:stCxn id="45" idx="1"/>
           </p:cNvCxnSpPr>
           <p:nvPr/>
         </p:nvCxnSpPr>
         <p:spPr>
           <a:xfrm rot="10800000" flipV="1">
-            <a:off x="2670048" y="5194630"/>
-            <a:ext cx="4069080" cy="355778"/>
+            <a:off x="2659118" y="5467249"/>
+            <a:ext cx="4080010" cy="90868"/>
           </a:xfrm>
           <a:prstGeom prst="bentConnector3">
             <a:avLst>
